--- a/EMART/이마트에브리데이_사업제안서_v3_260301.pptx
+++ b/EMART/이마트에브리데이_사업제안서_v3_260301.pptx
@@ -2840,7 +2840,7 @@
             <a:r>
               <a:rPr lang="en-US" sz="2800" b="1">
                 <a:solidFill>
-                  <a:srgbClr val="002b5b"/>
+                  <a:srgbClr val="151515"/>
                 </a:solidFill>
                 <a:latin typeface="LG Smart UI Bold"/>
                 <a:ea typeface="LG Smart UI Bold"/>
@@ -2863,7 +2863,7 @@
             <a:r>
               <a:rPr lang="en-US" sz="1600">
                 <a:solidFill>
-                  <a:srgbClr val="1f6bba"/>
+                  <a:srgbClr val="151515"/>
                 </a:solidFill>
                 <a:latin typeface="LG Smart UI Bold"/>
                 <a:ea typeface="LG Smart UI Bold"/>
@@ -3056,7 +3056,7 @@
             <a:r>
               <a:rPr lang="en-US" sz="2000" b="1">
                 <a:solidFill>
-                  <a:srgbClr val="002b5b"/>
+                  <a:srgbClr val="151515"/>
                 </a:solidFill>
                 <a:latin typeface="LG Smart UI Bold"/>
                 <a:ea typeface="LG Smart UI Bold"/>
@@ -3199,7 +3199,7 @@
             <a:r>
               <a:rPr lang="en-US" sz="1600" b="1">
                 <a:solidFill>
-                  <a:srgbClr val="002b5b"/>
+                  <a:srgbClr val="151515"/>
                 </a:solidFill>
                 <a:latin typeface="LG Smart UI Bold"/>
                 <a:ea typeface="LG Smart UI Bold"/>
@@ -3384,7 +3384,7 @@
             <a:r>
               <a:rPr lang="en-US" sz="1600" b="1">
                 <a:solidFill>
-                  <a:srgbClr val="002b5b"/>
+                  <a:srgbClr val="151515"/>
                 </a:solidFill>
                 <a:latin typeface="LG Smart UI Bold"/>
                 <a:ea typeface="LG Smart UI Bold"/>
@@ -3569,7 +3569,7 @@
             <a:r>
               <a:rPr lang="en-US" sz="1600" b="1">
                 <a:solidFill>
-                  <a:srgbClr val="002b5b"/>
+                  <a:srgbClr val="151515"/>
                 </a:solidFill>
                 <a:latin typeface="LG Smart UI Bold"/>
                 <a:ea typeface="LG Smart UI Bold"/>
@@ -3754,7 +3754,7 @@
             <a:r>
               <a:rPr lang="en-US" sz="1600" b="1">
                 <a:solidFill>
-                  <a:srgbClr val="002b5b"/>
+                  <a:srgbClr val="151515"/>
                 </a:solidFill>
                 <a:latin typeface="LG Smart UI Bold"/>
                 <a:ea typeface="LG Smart UI Bold"/>
@@ -3878,7 +3878,7 @@
             <a:r>
               <a:rPr lang="en-US" sz="2000" b="1">
                 <a:solidFill>
-                  <a:srgbClr val="002b5b"/>
+                  <a:srgbClr val="151515"/>
                 </a:solidFill>
                 <a:latin typeface="LG Smart UI Bold"/>
                 <a:ea typeface="LG Smart UI Bold"/>
@@ -4021,7 +4021,7 @@
             <a:r>
               <a:rPr lang="en-US" sz="1200">
                 <a:solidFill>
-                  <a:srgbClr val="002b5b"/>
+                  <a:srgbClr val="151515"/>
                 </a:solidFill>
                 <a:latin typeface="LG Smart UI Bold"/>
                 <a:ea typeface="LG Smart UI Bold"/>
@@ -4204,7 +4204,7 @@
             <a:r>
               <a:rPr lang="en-US" sz="1200">
                 <a:solidFill>
-                  <a:srgbClr val="002b5b"/>
+                  <a:srgbClr val="151515"/>
                 </a:solidFill>
                 <a:latin typeface="LG Smart UI Bold"/>
                 <a:ea typeface="LG Smart UI Bold"/>
@@ -4387,7 +4387,7 @@
             <a:r>
               <a:rPr lang="en-US" sz="1200">
                 <a:solidFill>
-                  <a:srgbClr val="002b5b"/>
+                  <a:srgbClr val="151515"/>
                 </a:solidFill>
                 <a:latin typeface="LG Smart UI Bold"/>
                 <a:ea typeface="LG Smart UI Bold"/>
@@ -4570,7 +4570,7 @@
             <a:r>
               <a:rPr lang="en-US" sz="1200">
                 <a:solidFill>
-                  <a:srgbClr val="002b5b"/>
+                  <a:srgbClr val="151515"/>
                 </a:solidFill>
                 <a:latin typeface="LG Smart UI Bold"/>
                 <a:ea typeface="LG Smart UI Bold"/>
@@ -4733,7 +4733,7 @@
             <a:r>
               <a:rPr lang="en-US" sz="2000" b="1">
                 <a:solidFill>
-                  <a:srgbClr val="002b5b"/>
+                  <a:srgbClr val="151515"/>
                 </a:solidFill>
                 <a:latin typeface="LG Smart UI Bold"/>
                 <a:ea typeface="LG Smart UI Bold"/>
@@ -4876,7 +4876,7 @@
             <a:r>
               <a:rPr lang="en-US" sz="1600" b="1">
                 <a:solidFill>
-                  <a:srgbClr val="002b5b"/>
+                  <a:srgbClr val="151515"/>
                 </a:solidFill>
                 <a:latin typeface="LG Smart UI Bold"/>
                 <a:ea typeface="LG Smart UI Bold"/>
@@ -5061,7 +5061,7 @@
             <a:r>
               <a:rPr lang="en-US" sz="1600" b="1">
                 <a:solidFill>
-                  <a:srgbClr val="002b5b"/>
+                  <a:srgbClr val="151515"/>
                 </a:solidFill>
                 <a:latin typeface="LG Smart UI Bold"/>
                 <a:ea typeface="LG Smart UI Bold"/>
@@ -5246,7 +5246,7 @@
             <a:r>
               <a:rPr lang="en-US" sz="1600" b="1">
                 <a:solidFill>
-                  <a:srgbClr val="002b5b"/>
+                  <a:srgbClr val="151515"/>
                 </a:solidFill>
                 <a:latin typeface="LG Smart UI Bold"/>
                 <a:ea typeface="LG Smart UI Bold"/>
@@ -5431,7 +5431,7 @@
             <a:r>
               <a:rPr lang="en-US" sz="1600" b="1">
                 <a:solidFill>
-                  <a:srgbClr val="002b5b"/>
+                  <a:srgbClr val="151515"/>
                 </a:solidFill>
                 <a:latin typeface="LG Smart UI Bold"/>
                 <a:ea typeface="LG Smart UI Bold"/>
@@ -5616,7 +5616,7 @@
             <a:r>
               <a:rPr lang="en-US" sz="1600" b="1">
                 <a:solidFill>
-                  <a:srgbClr val="002b5b"/>
+                  <a:srgbClr val="151515"/>
                 </a:solidFill>
                 <a:latin typeface="LG Smart UI Bold"/>
                 <a:ea typeface="LG Smart UI Bold"/>
@@ -5740,7 +5740,7 @@
             <a:r>
               <a:rPr lang="en-US" sz="2000" b="1">
                 <a:solidFill>
-                  <a:srgbClr val="002b5b"/>
+                  <a:srgbClr val="151515"/>
                 </a:solidFill>
                 <a:latin typeface="LG Smart UI Bold"/>
                 <a:ea typeface="LG Smart UI Bold"/>
@@ -5883,7 +5883,7 @@
             <a:r>
               <a:rPr lang="en-US" sz="1600" b="1">
                 <a:solidFill>
-                  <a:srgbClr val="002b5b"/>
+                  <a:srgbClr val="151515"/>
                 </a:solidFill>
                 <a:latin typeface="LG Smart UI Bold"/>
                 <a:ea typeface="LG Smart UI Bold"/>
@@ -6068,7 +6068,7 @@
             <a:r>
               <a:rPr lang="en-US" sz="1600" b="1">
                 <a:solidFill>
-                  <a:srgbClr val="002b5b"/>
+                  <a:srgbClr val="151515"/>
                 </a:solidFill>
                 <a:latin typeface="LG Smart UI Bold"/>
                 <a:ea typeface="LG Smart UI Bold"/>
@@ -6253,7 +6253,7 @@
             <a:r>
               <a:rPr lang="en-US" sz="1600" b="1">
                 <a:solidFill>
-                  <a:srgbClr val="002b5b"/>
+                  <a:srgbClr val="151515"/>
                 </a:solidFill>
                 <a:latin typeface="LG Smart UI Bold"/>
                 <a:ea typeface="LG Smart UI Bold"/>
@@ -6438,7 +6438,7 @@
             <a:r>
               <a:rPr lang="en-US" sz="1600" b="1">
                 <a:solidFill>
-                  <a:srgbClr val="002b5b"/>
+                  <a:srgbClr val="151515"/>
                 </a:solidFill>
                 <a:latin typeface="LG Smart UI Bold"/>
                 <a:ea typeface="LG Smart UI Bold"/>
@@ -6562,7 +6562,7 @@
             <a:r>
               <a:rPr lang="en-US" sz="2000" b="1">
                 <a:solidFill>
-                  <a:srgbClr val="002b5b"/>
+                  <a:srgbClr val="151515"/>
                 </a:solidFill>
                 <a:latin typeface="LG Smart UI Bold"/>
                 <a:ea typeface="LG Smart UI Bold"/>
@@ -6705,7 +6705,7 @@
             <a:r>
               <a:rPr lang="en-US" sz="1200">
                 <a:solidFill>
-                  <a:srgbClr val="002b5b"/>
+                  <a:srgbClr val="151515"/>
                 </a:solidFill>
                 <a:latin typeface="LG Smart UI Bold"/>
                 <a:ea typeface="LG Smart UI Bold"/>
@@ -6848,7 +6848,7 @@
             <a:r>
               <a:rPr lang="en-US" sz="1200">
                 <a:solidFill>
-                  <a:srgbClr val="002b5b"/>
+                  <a:srgbClr val="151515"/>
                 </a:solidFill>
                 <a:latin typeface="LG Smart UI Bold"/>
                 <a:ea typeface="LG Smart UI Bold"/>
@@ -6991,7 +6991,7 @@
             <a:r>
               <a:rPr lang="en-US" sz="1200">
                 <a:solidFill>
-                  <a:srgbClr val="002b5b"/>
+                  <a:srgbClr val="151515"/>
                 </a:solidFill>
                 <a:latin typeface="LG Smart UI Bold"/>
                 <a:ea typeface="LG Smart UI Bold"/>
@@ -7134,7 +7134,7 @@
             <a:r>
               <a:rPr lang="en-US" sz="1200">
                 <a:solidFill>
-                  <a:srgbClr val="002b5b"/>
+                  <a:srgbClr val="151515"/>
                 </a:solidFill>
                 <a:latin typeface="LG Smart UI Bold"/>
                 <a:ea typeface="LG Smart UI Bold"/>
@@ -7359,7 +7359,7 @@
             <a:r>
               <a:rPr lang="en-US" sz="2000" b="1">
                 <a:solidFill>
-                  <a:srgbClr val="002b5b"/>
+                  <a:srgbClr val="151515"/>
                 </a:solidFill>
                 <a:latin typeface="LG Smart UI Bold"/>
                 <a:ea typeface="LG Smart UI Bold"/>
@@ -7402,7 +7402,7 @@
             <a:r>
               <a:rPr lang="en-US" sz="1200">
                 <a:solidFill>
-                  <a:srgbClr val="002b5b"/>
+                  <a:srgbClr val="151515"/>
                 </a:solidFill>
                 <a:latin typeface="LG Smart UI Bold"/>
                 <a:ea typeface="LG Smart UI Bold"/>
@@ -7426,7 +7426,7 @@
             <a:r>
               <a:rPr lang="en-US" sz="1200">
                 <a:solidFill>
-                  <a:srgbClr val="002b5b"/>
+                  <a:srgbClr val="151515"/>
                 </a:solidFill>
                 <a:latin typeface="LG Smart UI Bold"/>
                 <a:ea typeface="LG Smart UI Bold"/>
@@ -7450,7 +7450,7 @@
             <a:r>
               <a:rPr lang="en-US" sz="1200">
                 <a:solidFill>
-                  <a:srgbClr val="002b5b"/>
+                  <a:srgbClr val="151515"/>
                 </a:solidFill>
                 <a:latin typeface="LG Smart UI Bold"/>
                 <a:ea typeface="LG Smart UI Bold"/>
@@ -7474,7 +7474,7 @@
             <a:r>
               <a:rPr lang="en-US" sz="1200">
                 <a:solidFill>
-                  <a:srgbClr val="002b5b"/>
+                  <a:srgbClr val="151515"/>
                 </a:solidFill>
                 <a:latin typeface="LG Smart UI Bold"/>
                 <a:ea typeface="LG Smart UI Bold"/>
@@ -7613,7 +7613,7 @@
             <a:r>
               <a:rPr lang="en-US" sz="600" u="sng">
                 <a:solidFill>
-                  <a:srgbClr val="002b5b"/>
+                  <a:srgbClr val="151515"/>
                 </a:solidFill>
                 <a:latin typeface="LG Smart UI Bold"/>
                 <a:ea typeface="LG Smart UI Bold"/>
@@ -7696,7 +7696,7 @@
             <a:r>
               <a:rPr lang="en-US" sz="2000" b="1">
                 <a:solidFill>
-                  <a:srgbClr val="002b5b"/>
+                  <a:srgbClr val="151515"/>
                 </a:solidFill>
                 <a:latin typeface="LG Smart UI Bold"/>
                 <a:ea typeface="LG Smart UI Bold"/>
@@ -7800,7 +7800,7 @@
             <a:r>
               <a:rPr lang="en-US" sz="1200">
                 <a:solidFill>
-                  <a:srgbClr val="002b5b"/>
+                  <a:srgbClr val="151515"/>
                 </a:solidFill>
                 <a:latin typeface="LG Smart UI Bold"/>
                 <a:ea typeface="LG Smart UI Bold"/>
@@ -7944,7 +7944,7 @@
             <a:r>
               <a:rPr lang="en-US" sz="1200">
                 <a:solidFill>
-                  <a:srgbClr val="002b5b"/>
+                  <a:srgbClr val="151515"/>
                 </a:solidFill>
                 <a:latin typeface="LG Smart UI Bold"/>
                 <a:ea typeface="LG Smart UI Bold"/>
@@ -8088,7 +8088,7 @@
             <a:r>
               <a:rPr lang="en-US" sz="1200">
                 <a:solidFill>
-                  <a:srgbClr val="002b5b"/>
+                  <a:srgbClr val="151515"/>
                 </a:solidFill>
                 <a:latin typeface="LG Smart UI Bold"/>
                 <a:ea typeface="LG Smart UI Bold"/>
@@ -8232,7 +8232,7 @@
             <a:r>
               <a:rPr lang="en-US" sz="1200">
                 <a:solidFill>
-                  <a:srgbClr val="002b5b"/>
+                  <a:srgbClr val="151515"/>
                 </a:solidFill>
                 <a:latin typeface="LG Smart UI Bold"/>
                 <a:ea typeface="LG Smart UI Bold"/>
@@ -8356,7 +8356,7 @@
             <a:r>
               <a:rPr lang="en-US" sz="2000" b="1">
                 <a:solidFill>
-                  <a:srgbClr val="002b5b"/>
+                  <a:srgbClr val="151515"/>
                 </a:solidFill>
                 <a:latin typeface="LG Smart UI Bold"/>
                 <a:ea typeface="LG Smart UI Bold"/>
@@ -8399,7 +8399,7 @@
             <a:r>
               <a:rPr lang="en-US" sz="1200">
                 <a:solidFill>
-                  <a:srgbClr val="002b5b"/>
+                  <a:srgbClr val="151515"/>
                 </a:solidFill>
                 <a:latin typeface="LG Smart UI Bold"/>
                 <a:ea typeface="LG Smart UI Bold"/>
@@ -8423,7 +8423,7 @@
             <a:r>
               <a:rPr lang="en-US" sz="1200">
                 <a:solidFill>
-                  <a:srgbClr val="002b5b"/>
+                  <a:srgbClr val="151515"/>
                 </a:solidFill>
                 <a:latin typeface="LG Smart UI Bold"/>
                 <a:ea typeface="LG Smart UI Bold"/>
@@ -8447,7 +8447,7 @@
             <a:r>
               <a:rPr lang="en-US" sz="1200">
                 <a:solidFill>
-                  <a:srgbClr val="002b5b"/>
+                  <a:srgbClr val="151515"/>
                 </a:solidFill>
                 <a:latin typeface="LG Smart UI Bold"/>
                 <a:ea typeface="LG Smart UI Bold"/>
@@ -8632,7 +8632,7 @@
                       <a:r>
                         <a:rPr lang="en-US" sz="1200">
                           <a:solidFill>
-                            <a:srgbClr val="002b5b"/>
+                            <a:srgbClr val="151515"/>
                           </a:solidFill>
                         </a:rPr>
                         <a:t>1회 공구 매출</a:t>
@@ -8693,7 +8693,7 @@
                       <a:r>
                         <a:rPr lang="en-US" sz="1200">
                           <a:solidFill>
-                            <a:srgbClr val="002b5b"/>
+                            <a:srgbClr val="151515"/>
                           </a:solidFill>
                         </a:rPr>
                         <a:t>1,000만원</a:t>
@@ -8756,7 +8756,7 @@
                       <a:r>
                         <a:rPr lang="en-US" sz="1200">
                           <a:solidFill>
-                            <a:srgbClr val="002b5b"/>
+                            <a:srgbClr val="151515"/>
                           </a:solidFill>
                         </a:rPr>
                         <a:t>점포 수수료 (5%)</a:t>
@@ -8817,7 +8817,7 @@
                       <a:r>
                         <a:rPr lang="en-US" sz="1200">
                           <a:solidFill>
-                            <a:srgbClr val="002b5b"/>
+                            <a:srgbClr val="151515"/>
                           </a:solidFill>
                         </a:rPr>
                         <a:t>50만원</a:t>
@@ -9050,7 +9050,7 @@
             <a:r>
               <a:rPr lang="en-US" sz="2000" b="1">
                 <a:solidFill>
-                  <a:srgbClr val="002b5b"/>
+                  <a:srgbClr val="151515"/>
                 </a:solidFill>
                 <a:latin typeface="LG Smart UI Bold"/>
                 <a:ea typeface="LG Smart UI Bold"/>
@@ -9154,7 +9154,7 @@
             <a:r>
               <a:rPr lang="en-US" sz="1600" b="1">
                 <a:solidFill>
-                  <a:srgbClr val="002b5b"/>
+                  <a:srgbClr val="151515"/>
                 </a:solidFill>
                 <a:latin typeface="LG Smart UI Bold"/>
                 <a:ea typeface="LG Smart UI Bold"/>
@@ -9300,7 +9300,7 @@
             <a:r>
               <a:rPr lang="en-US" sz="1600" b="1">
                 <a:solidFill>
-                  <a:srgbClr val="002b5b"/>
+                  <a:srgbClr val="151515"/>
                 </a:solidFill>
                 <a:latin typeface="LG Smart UI Bold"/>
                 <a:ea typeface="LG Smart UI Bold"/>
@@ -9446,7 +9446,7 @@
             <a:r>
               <a:rPr lang="en-US" sz="1600" b="1">
                 <a:solidFill>
-                  <a:srgbClr val="002b5b"/>
+                  <a:srgbClr val="151515"/>
                 </a:solidFill>
                 <a:latin typeface="LG Smart UI Bold"/>
                 <a:ea typeface="LG Smart UI Bold"/>
@@ -9651,7 +9651,7 @@
             <a:r>
               <a:rPr lang="en-US" sz="2000" b="1">
                 <a:solidFill>
-                  <a:srgbClr val="002b5b"/>
+                  <a:srgbClr val="151515"/>
                 </a:solidFill>
                 <a:latin typeface="LG Smart UI Bold"/>
                 <a:ea typeface="LG Smart UI Bold"/>
@@ -9661,7 +9661,7 @@
             <a:r>
               <a:rPr lang="ko-KR" altLang="en-US" sz="2000" b="1">
                 <a:solidFill>
-                  <a:srgbClr val="002b5b"/>
+                  <a:srgbClr val="151515"/>
                 </a:solidFill>
                 <a:latin typeface="LG Smart UI Bold"/>
                 <a:ea typeface="LG Smart UI Bold"/>
@@ -9671,7 +9671,7 @@
             <a:r>
               <a:rPr lang="en-US" sz="2000" b="1">
                 <a:solidFill>
-                  <a:srgbClr val="002b5b"/>
+                  <a:srgbClr val="151515"/>
                 </a:solidFill>
                 <a:latin typeface="LG Smart UI Bold"/>
                 <a:ea typeface="LG Smart UI Bold"/>
@@ -9681,7 +9681,7 @@
             <a:r>
               <a:rPr lang="ko-KR" altLang="en-US" sz="2000" b="1">
                 <a:solidFill>
-                  <a:srgbClr val="002b5b"/>
+                  <a:srgbClr val="151515"/>
                 </a:solidFill>
                 <a:latin typeface="LG Smart UI Bold"/>
                 <a:ea typeface="LG Smart UI Bold"/>
@@ -9691,7 +9691,7 @@
             <a:r>
               <a:rPr lang="en-US" sz="2000" b="1">
                 <a:solidFill>
-                  <a:srgbClr val="002b5b"/>
+                  <a:srgbClr val="151515"/>
                 </a:solidFill>
                 <a:latin typeface="LG Smart UI Bold"/>
                 <a:ea typeface="LG Smart UI Bold"/>
@@ -10845,7 +10845,7 @@
             <a:r>
               <a:rPr lang="en-US" sz="2000" b="1">
                 <a:solidFill>
-                  <a:srgbClr val="002b5b"/>
+                  <a:srgbClr val="151515"/>
                 </a:solidFill>
                 <a:latin typeface="LG Smart UI Bold"/>
                 <a:ea typeface="LG Smart UI Bold"/>
@@ -10949,7 +10949,7 @@
             <a:r>
               <a:rPr lang="en-US" sz="1200">
                 <a:solidFill>
-                  <a:srgbClr val="002b5b"/>
+                  <a:srgbClr val="151515"/>
                 </a:solidFill>
                 <a:latin typeface="LG Smart UI Bold"/>
                 <a:ea typeface="LG Smart UI Bold"/>
@@ -11093,7 +11093,7 @@
             <a:r>
               <a:rPr lang="en-US" sz="1200">
                 <a:solidFill>
-                  <a:srgbClr val="002b5b"/>
+                  <a:srgbClr val="151515"/>
                 </a:solidFill>
                 <a:latin typeface="LG Smart UI Bold"/>
                 <a:ea typeface="LG Smart UI Bold"/>
@@ -11237,7 +11237,7 @@
             <a:r>
               <a:rPr lang="en-US" sz="1200">
                 <a:solidFill>
-                  <a:srgbClr val="002b5b"/>
+                  <a:srgbClr val="151515"/>
                 </a:solidFill>
                 <a:latin typeface="LG Smart UI Bold"/>
                 <a:ea typeface="LG Smart UI Bold"/>
@@ -11381,7 +11381,7 @@
             <a:r>
               <a:rPr lang="en-US" sz="1200">
                 <a:solidFill>
-                  <a:srgbClr val="002b5b"/>
+                  <a:srgbClr val="151515"/>
                 </a:solidFill>
                 <a:latin typeface="LG Smart UI Bold"/>
                 <a:ea typeface="LG Smart UI Bold"/>
@@ -11525,7 +11525,7 @@
             <a:r>
               <a:rPr lang="en-US" sz="1200">
                 <a:solidFill>
-                  <a:srgbClr val="002b5b"/>
+                  <a:srgbClr val="151515"/>
                 </a:solidFill>
                 <a:latin typeface="LG Smart UI Bold"/>
                 <a:ea typeface="LG Smart UI Bold"/>
@@ -11688,7 +11688,7 @@
             <a:r>
               <a:rPr lang="en-US" sz="2000" b="1">
                 <a:solidFill>
-                  <a:srgbClr val="002b5b"/>
+                  <a:srgbClr val="151515"/>
                 </a:solidFill>
                 <a:latin typeface="LG Smart UI Bold"/>
                 <a:ea typeface="LG Smart UI Bold"/>
@@ -11831,7 +11831,7 @@
             <a:r>
               <a:rPr lang="en-US" sz="1600" b="1">
                 <a:solidFill>
-                  <a:srgbClr val="002b5b"/>
+                  <a:srgbClr val="151515"/>
                 </a:solidFill>
                 <a:latin typeface="LG Smart UI Bold"/>
                 <a:ea typeface="LG Smart UI Bold"/>
@@ -12016,7 +12016,7 @@
             <a:r>
               <a:rPr lang="en-US" sz="1600" b="1">
                 <a:solidFill>
-                  <a:srgbClr val="002b5b"/>
+                  <a:srgbClr val="151515"/>
                 </a:solidFill>
                 <a:latin typeface="LG Smart UI Bold"/>
                 <a:ea typeface="LG Smart UI Bold"/>
@@ -12201,7 +12201,7 @@
             <a:r>
               <a:rPr lang="en-US" sz="1600" b="1">
                 <a:solidFill>
-                  <a:srgbClr val="002b5b"/>
+                  <a:srgbClr val="151515"/>
                 </a:solidFill>
                 <a:latin typeface="LG Smart UI Bold"/>
                 <a:ea typeface="LG Smart UI Bold"/>
@@ -12386,7 +12386,7 @@
             <a:r>
               <a:rPr lang="en-US" sz="1600" b="1">
                 <a:solidFill>
-                  <a:srgbClr val="002b5b"/>
+                  <a:srgbClr val="151515"/>
                 </a:solidFill>
                 <a:latin typeface="LG Smart UI Bold"/>
                 <a:ea typeface="LG Smart UI Bold"/>
@@ -12591,7 +12591,7 @@
             <a:r>
               <a:rPr lang="en-US" sz="2000" b="1">
                 <a:solidFill>
-                  <a:srgbClr val="002b5b"/>
+                  <a:srgbClr val="151515"/>
                 </a:solidFill>
                 <a:latin typeface="LG Smart UI Bold"/>
                 <a:ea typeface="LG Smart UI Bold"/>
@@ -12734,7 +12734,7 @@
             <a:r>
               <a:rPr lang="en-US" sz="1200">
                 <a:solidFill>
-                  <a:srgbClr val="002b5b"/>
+                  <a:srgbClr val="151515"/>
                 </a:solidFill>
                 <a:latin typeface="LG Smart UI Bold"/>
                 <a:ea typeface="LG Smart UI Bold"/>
@@ -12917,7 +12917,7 @@
             <a:r>
               <a:rPr lang="en-US" sz="1200">
                 <a:solidFill>
-                  <a:srgbClr val="002b5b"/>
+                  <a:srgbClr val="151515"/>
                 </a:solidFill>
                 <a:latin typeface="LG Smart UI Bold"/>
                 <a:ea typeface="LG Smart UI Bold"/>
@@ -13100,7 +13100,7 @@
             <a:r>
               <a:rPr lang="en-US" sz="1200">
                 <a:solidFill>
-                  <a:srgbClr val="002b5b"/>
+                  <a:srgbClr val="151515"/>
                 </a:solidFill>
                 <a:latin typeface="LG Smart UI Bold"/>
                 <a:ea typeface="LG Smart UI Bold"/>
@@ -13283,7 +13283,7 @@
             <a:r>
               <a:rPr lang="en-US" sz="1200">
                 <a:solidFill>
-                  <a:srgbClr val="002b5b"/>
+                  <a:srgbClr val="151515"/>
                 </a:solidFill>
                 <a:latin typeface="LG Smart UI Bold"/>
                 <a:ea typeface="LG Smart UI Bold"/>

--- a/EMART/이마트에브리데이_사업제안서_v3_260301.pptx
+++ b/EMART/이마트에브리데이_사업제안서_v3_260301.pptx
@@ -3162,8 +3162,8 @@
         </p:blipFill>
         <p:spPr>
           <a:xfrm>
-            <a:off x="594360" y="1737360"/>
-            <a:ext cx="365760" cy="365760"/>
+            <a:off x="640080" y="1810512"/>
+            <a:ext cx="274320" cy="219456"/>
           </a:xfrm>
           <a:prstGeom prst="rect">
             <a:avLst/>
@@ -3347,8 +3347,8 @@
         </p:blipFill>
         <p:spPr>
           <a:xfrm>
-            <a:off x="4709160" y="1737360"/>
-            <a:ext cx="365760" cy="365760"/>
+            <a:off x="4772025" y="1783080"/>
+            <a:ext cx="240030" cy="274320"/>
           </a:xfrm>
           <a:prstGeom prst="rect">
             <a:avLst/>
@@ -3532,8 +3532,8 @@
         </p:blipFill>
         <p:spPr>
           <a:xfrm>
-            <a:off x="594360" y="3291840"/>
-            <a:ext cx="365760" cy="365760"/>
+            <a:off x="640080" y="3337560"/>
+            <a:ext cx="274320" cy="274320"/>
           </a:xfrm>
           <a:prstGeom prst="rect">
             <a:avLst/>
@@ -3717,8 +3717,8 @@
         </p:blipFill>
         <p:spPr>
           <a:xfrm>
-            <a:off x="4709160" y="3291840"/>
-            <a:ext cx="365760" cy="365760"/>
+            <a:off x="4772025" y="3337560"/>
+            <a:ext cx="240030" cy="274320"/>
           </a:xfrm>
           <a:prstGeom prst="rect">
             <a:avLst/>
@@ -3984,8 +3984,8 @@
         </p:blipFill>
         <p:spPr>
           <a:xfrm>
-            <a:off x="1078992" y="1965960"/>
-            <a:ext cx="457200" cy="457200"/>
+            <a:off x="1161288" y="2048256"/>
+            <a:ext cx="329184" cy="292608"/>
           </a:xfrm>
           <a:prstGeom prst="rect">
             <a:avLst/>
@@ -4167,8 +4167,8 @@
         </p:blipFill>
         <p:spPr>
           <a:xfrm>
-            <a:off x="3364992" y="1965960"/>
-            <a:ext cx="457200" cy="457200"/>
+            <a:off x="3447288" y="2048256"/>
+            <a:ext cx="329184" cy="292608"/>
           </a:xfrm>
           <a:prstGeom prst="rect">
             <a:avLst/>
@@ -4350,8 +4350,8 @@
         </p:blipFill>
         <p:spPr>
           <a:xfrm>
-            <a:off x="5650992" y="1965960"/>
-            <a:ext cx="457200" cy="457200"/>
+            <a:off x="5753862" y="2029968"/>
+            <a:ext cx="288036" cy="329184"/>
           </a:xfrm>
           <a:prstGeom prst="rect">
             <a:avLst/>
@@ -4533,8 +4533,8 @@
         </p:blipFill>
         <p:spPr>
           <a:xfrm>
-            <a:off x="7936992" y="1965960"/>
-            <a:ext cx="457200" cy="457200"/>
+            <a:off x="8019288" y="2029968"/>
+            <a:ext cx="329184" cy="329184"/>
           </a:xfrm>
           <a:prstGeom prst="rect">
             <a:avLst/>
@@ -4650,6 +4650,11 @@
             </a:pPr>
             <a:r>
               <a:rPr lang="en-US" sz="1400" b="1">
+                <a:ln w="9525">
+                  <a:solidFill>
+                    <a:srgbClr val="151515"/>
+                  </a:solidFill>
+                </a:ln>
                 <a:solidFill>
                   <a:srgbClr val="ffffff"/>
                 </a:solidFill>
@@ -4839,8 +4844,8 @@
         </p:blipFill>
         <p:spPr>
           <a:xfrm>
-            <a:off x="594360" y="1920240"/>
-            <a:ext cx="365760" cy="365760"/>
+            <a:off x="674370" y="1965960"/>
+            <a:ext cx="205740" cy="274320"/>
           </a:xfrm>
           <a:prstGeom prst="rect">
             <a:avLst/>
@@ -5024,8 +5029,8 @@
         </p:blipFill>
         <p:spPr>
           <a:xfrm>
-            <a:off x="3337560" y="1920240"/>
-            <a:ext cx="365760" cy="365760"/>
+            <a:off x="3383280" y="1965960"/>
+            <a:ext cx="274320" cy="274320"/>
           </a:xfrm>
           <a:prstGeom prst="rect">
             <a:avLst/>
@@ -5209,8 +5214,8 @@
         </p:blipFill>
         <p:spPr>
           <a:xfrm>
-            <a:off x="6080760" y="1920240"/>
-            <a:ext cx="365760" cy="365760"/>
+            <a:off x="6126480" y="1993392"/>
+            <a:ext cx="274320" cy="219456"/>
           </a:xfrm>
           <a:prstGeom prst="rect">
             <a:avLst/>
@@ -5394,8 +5399,8 @@
         </p:blipFill>
         <p:spPr>
           <a:xfrm>
-            <a:off x="594360" y="3383280"/>
-            <a:ext cx="365760" cy="365760"/>
+            <a:off x="640080" y="3429000"/>
+            <a:ext cx="274320" cy="274320"/>
           </a:xfrm>
           <a:prstGeom prst="rect">
             <a:avLst/>
@@ -5579,8 +5584,8 @@
         </p:blipFill>
         <p:spPr>
           <a:xfrm>
-            <a:off x="3337560" y="3383280"/>
-            <a:ext cx="365760" cy="365760"/>
+            <a:off x="3383280" y="3429000"/>
+            <a:ext cx="274320" cy="274320"/>
           </a:xfrm>
           <a:prstGeom prst="rect">
             <a:avLst/>
@@ -5846,8 +5851,8 @@
         </p:blipFill>
         <p:spPr>
           <a:xfrm>
-            <a:off x="1078992" y="1965960"/>
-            <a:ext cx="457200" cy="457200"/>
+            <a:off x="1181862" y="2029968"/>
+            <a:ext cx="288036" cy="329184"/>
           </a:xfrm>
           <a:prstGeom prst="rect">
             <a:avLst/>
@@ -6031,8 +6036,8 @@
         </p:blipFill>
         <p:spPr>
           <a:xfrm>
-            <a:off x="3288792" y="1965960"/>
-            <a:ext cx="457200" cy="457200"/>
+            <a:off x="3371088" y="2029968"/>
+            <a:ext cx="329184" cy="329184"/>
           </a:xfrm>
           <a:prstGeom prst="rect">
             <a:avLst/>
@@ -6216,8 +6221,8 @@
         </p:blipFill>
         <p:spPr>
           <a:xfrm>
-            <a:off x="5517642" y="1965960"/>
-            <a:ext cx="457200" cy="457200"/>
+            <a:off x="5599938" y="2029968"/>
+            <a:ext cx="329184" cy="329184"/>
           </a:xfrm>
           <a:prstGeom prst="rect">
             <a:avLst/>
@@ -6401,8 +6406,8 @@
         </p:blipFill>
         <p:spPr>
           <a:xfrm>
-            <a:off x="7689342" y="1965960"/>
-            <a:ext cx="457200" cy="457200"/>
+            <a:off x="7771638" y="2062886"/>
+            <a:ext cx="329184" cy="263347"/>
           </a:xfrm>
           <a:prstGeom prst="rect">
             <a:avLst/>
@@ -6668,8 +6673,8 @@
         </p:blipFill>
         <p:spPr>
           <a:xfrm>
-            <a:off x="576072" y="1399032"/>
-            <a:ext cx="310896" cy="310896"/>
+            <a:off x="621792" y="1456944"/>
+            <a:ext cx="219456" cy="195072"/>
           </a:xfrm>
           <a:prstGeom prst="rect">
             <a:avLst/>
@@ -6811,8 +6816,8 @@
         </p:blipFill>
         <p:spPr>
           <a:xfrm>
-            <a:off x="576072" y="2084832"/>
-            <a:ext cx="310896" cy="310896"/>
+            <a:off x="649224" y="2130552"/>
+            <a:ext cx="164592" cy="219456"/>
           </a:xfrm>
           <a:prstGeom prst="rect">
             <a:avLst/>
@@ -6954,8 +6959,8 @@
         </p:blipFill>
         <p:spPr>
           <a:xfrm>
-            <a:off x="576072" y="2770632"/>
-            <a:ext cx="310896" cy="310896"/>
+            <a:off x="621792" y="2828544"/>
+            <a:ext cx="219456" cy="195072"/>
           </a:xfrm>
           <a:prstGeom prst="rect">
             <a:avLst/>
@@ -7097,8 +7102,8 @@
         </p:blipFill>
         <p:spPr>
           <a:xfrm>
-            <a:off x="576072" y="3456432"/>
-            <a:ext cx="310896" cy="310896"/>
+            <a:off x="621792" y="3502152"/>
+            <a:ext cx="219456" cy="219456"/>
           </a:xfrm>
           <a:prstGeom prst="rect">
             <a:avLst/>
@@ -7201,8 +7206,8 @@
         </p:blipFill>
         <p:spPr>
           <a:xfrm>
-            <a:off x="6766560" y="1737360"/>
-            <a:ext cx="1554480" cy="1554480"/>
+            <a:off x="6858000" y="1965960"/>
+            <a:ext cx="1371600" cy="1097280"/>
           </a:xfrm>
           <a:prstGeom prst="rect">
             <a:avLst/>
@@ -7276,6 +7281,11 @@
             </a:pPr>
             <a:r>
               <a:rPr lang="en-US" sz="1400" b="1">
+                <a:ln w="9525">
+                  <a:solidFill>
+                    <a:srgbClr val="151515"/>
+                  </a:solidFill>
+                </a:ln>
                 <a:solidFill>
                   <a:srgbClr val="ffffff"/>
                 </a:solidFill>
@@ -7570,6 +7580,11 @@
             </a:pPr>
             <a:r>
               <a:rPr lang="en-US" sz="1400" b="1">
+                <a:ln w="9525">
+                  <a:solidFill>
+                    <a:srgbClr val="151515"/>
+                  </a:solidFill>
+                </a:ln>
                 <a:solidFill>
                   <a:srgbClr val="ffffff"/>
                 </a:solidFill>
@@ -7763,8 +7778,8 @@
         </p:blipFill>
         <p:spPr>
           <a:xfrm>
-            <a:off x="914400" y="2148840"/>
-            <a:ext cx="548640" cy="548640"/>
+            <a:off x="914400" y="2249424"/>
+            <a:ext cx="548640" cy="438912"/>
           </a:xfrm>
           <a:prstGeom prst="rect">
             <a:avLst/>
@@ -7907,8 +7922,8 @@
         </p:blipFill>
         <p:spPr>
           <a:xfrm>
-            <a:off x="3200400" y="2148840"/>
-            <a:ext cx="548640" cy="548640"/>
+            <a:off x="3200400" y="2225040"/>
+            <a:ext cx="548640" cy="487680"/>
           </a:xfrm>
           <a:prstGeom prst="rect">
             <a:avLst/>
@@ -8051,8 +8066,8 @@
         </p:blipFill>
         <p:spPr>
           <a:xfrm>
-            <a:off x="5486400" y="2148840"/>
-            <a:ext cx="548640" cy="548640"/>
+            <a:off x="5486400" y="2249424"/>
+            <a:ext cx="548640" cy="438912"/>
           </a:xfrm>
           <a:prstGeom prst="rect">
             <a:avLst/>
@@ -8195,8 +8210,8 @@
         </p:blipFill>
         <p:spPr>
           <a:xfrm>
-            <a:off x="7772400" y="2148840"/>
-            <a:ext cx="548640" cy="548640"/>
+            <a:off x="7772400" y="2225040"/>
+            <a:ext cx="548640" cy="487680"/>
           </a:xfrm>
           <a:prstGeom prst="rect">
             <a:avLst/>
@@ -8938,6 +8953,11 @@
             </a:pPr>
             <a:r>
               <a:rPr lang="en-US" sz="1400" b="1">
+                <a:ln w="9525">
+                  <a:solidFill>
+                    <a:srgbClr val="151515"/>
+                  </a:solidFill>
+                </a:ln>
                 <a:solidFill>
                   <a:srgbClr val="ffffff"/>
                 </a:solidFill>
@@ -9117,8 +9137,8 @@
         </p:blipFill>
         <p:spPr>
           <a:xfrm>
-            <a:off x="1143000" y="1874520"/>
-            <a:ext cx="640080" cy="640080"/>
+            <a:off x="1143000" y="1910080"/>
+            <a:ext cx="640080" cy="568960"/>
           </a:xfrm>
           <a:prstGeom prst="rect">
             <a:avLst/>
@@ -9263,8 +9283,8 @@
         </p:blipFill>
         <p:spPr>
           <a:xfrm>
-            <a:off x="3886200" y="1874520"/>
-            <a:ext cx="640080" cy="640080"/>
+            <a:off x="3926205" y="1874520"/>
+            <a:ext cx="560070" cy="640080"/>
           </a:xfrm>
           <a:prstGeom prst="rect">
             <a:avLst/>
@@ -9568,6 +9588,11 @@
             </a:pPr>
             <a:r>
               <a:rPr lang="en-US" sz="1400" b="1">
+                <a:ln w="9525">
+                  <a:solidFill>
+                    <a:srgbClr val="151515"/>
+                  </a:solidFill>
+                </a:ln>
                 <a:solidFill>
                   <a:srgbClr val="ffffff"/>
                 </a:solidFill>
@@ -10912,8 +10937,8 @@
         </p:blipFill>
         <p:spPr>
           <a:xfrm>
-            <a:off x="731520" y="2148840"/>
-            <a:ext cx="548640" cy="548640"/>
+            <a:off x="731520" y="2225040"/>
+            <a:ext cx="548640" cy="487680"/>
           </a:xfrm>
           <a:prstGeom prst="rect">
             <a:avLst/>
@@ -11056,8 +11081,8 @@
         </p:blipFill>
         <p:spPr>
           <a:xfrm>
-            <a:off x="2377440" y="2148840"/>
-            <a:ext cx="548640" cy="548640"/>
+            <a:off x="2411730" y="2194560"/>
+            <a:ext cx="480060" cy="548640"/>
           </a:xfrm>
           <a:prstGeom prst="rect">
             <a:avLst/>
@@ -11344,8 +11369,8 @@
         </p:blipFill>
         <p:spPr>
           <a:xfrm>
-            <a:off x="5669280" y="2148840"/>
-            <a:ext cx="548640" cy="548640"/>
+            <a:off x="5737860" y="2194560"/>
+            <a:ext cx="411480" cy="548640"/>
           </a:xfrm>
           <a:prstGeom prst="rect">
             <a:avLst/>
@@ -11488,8 +11513,8 @@
         </p:blipFill>
         <p:spPr>
           <a:xfrm>
-            <a:off x="7315200" y="2148840"/>
-            <a:ext cx="548640" cy="548640"/>
+            <a:off x="7349490" y="2194560"/>
+            <a:ext cx="480060" cy="548640"/>
           </a:xfrm>
           <a:prstGeom prst="rect">
             <a:avLst/>
@@ -11605,6 +11630,11 @@
             </a:pPr>
             <a:r>
               <a:rPr lang="en-US" sz="1400" b="1">
+                <a:ln w="9525">
+                  <a:solidFill>
+                    <a:srgbClr val="151515"/>
+                  </a:solidFill>
+                </a:ln>
                 <a:solidFill>
                   <a:srgbClr val="ffffff"/>
                 </a:solidFill>
@@ -11794,8 +11824,8 @@
         </p:blipFill>
         <p:spPr>
           <a:xfrm>
-            <a:off x="594360" y="1737360"/>
-            <a:ext cx="365760" cy="365760"/>
+            <a:off x="674370" y="1783080"/>
+            <a:ext cx="205740" cy="274320"/>
           </a:xfrm>
           <a:prstGeom prst="rect">
             <a:avLst/>
@@ -11979,8 +12009,8 @@
         </p:blipFill>
         <p:spPr>
           <a:xfrm>
-            <a:off x="4709160" y="1737360"/>
-            <a:ext cx="365760" cy="365760"/>
+            <a:off x="4789170" y="1783080"/>
+            <a:ext cx="205740" cy="274320"/>
           </a:xfrm>
           <a:prstGeom prst="rect">
             <a:avLst/>
@@ -12164,8 +12194,8 @@
         </p:blipFill>
         <p:spPr>
           <a:xfrm>
-            <a:off x="594360" y="3291840"/>
-            <a:ext cx="365760" cy="365760"/>
+            <a:off x="674370" y="3337560"/>
+            <a:ext cx="205740" cy="274320"/>
           </a:xfrm>
           <a:prstGeom prst="rect">
             <a:avLst/>
@@ -12349,8 +12379,8 @@
         </p:blipFill>
         <p:spPr>
           <a:xfrm>
-            <a:off x="4709160" y="3291840"/>
-            <a:ext cx="365760" cy="365760"/>
+            <a:off x="4754880" y="3352800"/>
+            <a:ext cx="274320" cy="243840"/>
           </a:xfrm>
           <a:prstGeom prst="rect">
             <a:avLst/>
@@ -12508,6 +12538,11 @@
             </a:pPr>
             <a:r>
               <a:rPr lang="en-US" sz="1400" b="1">
+                <a:ln w="9525">
+                  <a:solidFill>
+                    <a:srgbClr val="151515"/>
+                  </a:solidFill>
+                </a:ln>
                 <a:solidFill>
                   <a:srgbClr val="ffffff"/>
                 </a:solidFill>
@@ -12697,8 +12732,8 @@
         </p:blipFill>
         <p:spPr>
           <a:xfrm>
-            <a:off x="1143000" y="1965960"/>
-            <a:ext cx="457200" cy="457200"/>
+            <a:off x="1248156" y="2029968"/>
+            <a:ext cx="246888" cy="329184"/>
           </a:xfrm>
           <a:prstGeom prst="rect">
             <a:avLst/>
@@ -12880,8 +12915,8 @@
         </p:blipFill>
         <p:spPr>
           <a:xfrm>
-            <a:off x="3429000" y="1965960"/>
-            <a:ext cx="457200" cy="457200"/>
+            <a:off x="3493008" y="2062886"/>
+            <a:ext cx="329184" cy="263347"/>
           </a:xfrm>
           <a:prstGeom prst="rect">
             <a:avLst/>
@@ -13063,8 +13098,8 @@
         </p:blipFill>
         <p:spPr>
           <a:xfrm>
-            <a:off x="5715000" y="1965960"/>
-            <a:ext cx="457200" cy="457200"/>
+            <a:off x="5779008" y="2048256"/>
+            <a:ext cx="329184" cy="292608"/>
           </a:xfrm>
           <a:prstGeom prst="rect">
             <a:avLst/>
@@ -13246,8 +13281,8 @@
         </p:blipFill>
         <p:spPr>
           <a:xfrm>
-            <a:off x="8001000" y="1965960"/>
-            <a:ext cx="457200" cy="457200"/>
+            <a:off x="8065008" y="2048256"/>
+            <a:ext cx="329184" cy="292608"/>
           </a:xfrm>
           <a:prstGeom prst="rect">
             <a:avLst/>
@@ -13363,6 +13398,11 @@
             </a:pPr>
             <a:r>
               <a:rPr lang="en-US" sz="1400" b="1">
+                <a:ln w="9525">
+                  <a:solidFill>
+                    <a:srgbClr val="151515"/>
+                  </a:solidFill>
+                </a:ln>
                 <a:solidFill>
                   <a:srgbClr val="ffffff"/>
                 </a:solidFill>

--- a/EMART/이마트에브리데이_사업제안서_v3_260301.pptx
+++ b/EMART/이마트에브리데이_사업제안서_v3_260301.pptx
@@ -4650,13 +4650,8 @@
             </a:pPr>
             <a:r>
               <a:rPr lang="en-US" sz="1400" b="1">
-                <a:ln w="9525">
-                  <a:solidFill>
-                    <a:srgbClr val="151515"/>
-                  </a:solidFill>
-                </a:ln>
                 <a:solidFill>
-                  <a:srgbClr val="ffffff"/>
+                  <a:srgbClr val="151515"/>
                 </a:solidFill>
                 <a:latin typeface="LG Smart UI Bold"/>
                 <a:ea typeface="LG Smart UI Bold"/>
@@ -7281,13 +7276,8 @@
             </a:pPr>
             <a:r>
               <a:rPr lang="en-US" sz="1400" b="1">
-                <a:ln w="9525">
-                  <a:solidFill>
-                    <a:srgbClr val="151515"/>
-                  </a:solidFill>
-                </a:ln>
                 <a:solidFill>
-                  <a:srgbClr val="ffffff"/>
+                  <a:srgbClr val="151515"/>
                 </a:solidFill>
                 <a:latin typeface="LG Smart UI Bold"/>
                 <a:ea typeface="LG Smart UI Bold"/>
@@ -7580,13 +7570,8 @@
             </a:pPr>
             <a:r>
               <a:rPr lang="en-US" sz="1400" b="1">
-                <a:ln w="9525">
-                  <a:solidFill>
-                    <a:srgbClr val="151515"/>
-                  </a:solidFill>
-                </a:ln>
                 <a:solidFill>
-                  <a:srgbClr val="ffffff"/>
+                  <a:srgbClr val="151515"/>
                 </a:solidFill>
                 <a:latin typeface="LG Smart UI Bold"/>
                 <a:ea typeface="LG Smart UI Bold"/>
@@ -8953,13 +8938,8 @@
             </a:pPr>
             <a:r>
               <a:rPr lang="en-US" sz="1400" b="1">
-                <a:ln w="9525">
-                  <a:solidFill>
-                    <a:srgbClr val="151515"/>
-                  </a:solidFill>
-                </a:ln>
                 <a:solidFill>
-                  <a:srgbClr val="ffffff"/>
+                  <a:srgbClr val="151515"/>
                 </a:solidFill>
                 <a:latin typeface="LG Smart UI Bold"/>
                 <a:ea typeface="LG Smart UI Bold"/>
@@ -9588,13 +9568,8 @@
             </a:pPr>
             <a:r>
               <a:rPr lang="en-US" sz="1400" b="1">
-                <a:ln w="9525">
-                  <a:solidFill>
-                    <a:srgbClr val="151515"/>
-                  </a:solidFill>
-                </a:ln>
                 <a:solidFill>
-                  <a:srgbClr val="ffffff"/>
+                  <a:srgbClr val="151515"/>
                 </a:solidFill>
                 <a:latin typeface="LG Smart UI Bold"/>
                 <a:ea typeface="LG Smart UI Bold"/>
@@ -11630,13 +11605,8 @@
             </a:pPr>
             <a:r>
               <a:rPr lang="en-US" sz="1400" b="1">
-                <a:ln w="9525">
-                  <a:solidFill>
-                    <a:srgbClr val="151515"/>
-                  </a:solidFill>
-                </a:ln>
                 <a:solidFill>
-                  <a:srgbClr val="ffffff"/>
+                  <a:srgbClr val="151515"/>
                 </a:solidFill>
                 <a:latin typeface="LG Smart UI Bold"/>
                 <a:ea typeface="LG Smart UI Bold"/>
@@ -12538,13 +12508,8 @@
             </a:pPr>
             <a:r>
               <a:rPr lang="en-US" sz="1400" b="1">
-                <a:ln w="9525">
-                  <a:solidFill>
-                    <a:srgbClr val="151515"/>
-                  </a:solidFill>
-                </a:ln>
                 <a:solidFill>
-                  <a:srgbClr val="ffffff"/>
+                  <a:srgbClr val="151515"/>
                 </a:solidFill>
                 <a:latin typeface="LG Smart UI Bold"/>
                 <a:ea typeface="LG Smart UI Bold"/>
@@ -13398,13 +13363,8 @@
             </a:pPr>
             <a:r>
               <a:rPr lang="en-US" sz="1400" b="1">
-                <a:ln w="9525">
-                  <a:solidFill>
-                    <a:srgbClr val="151515"/>
-                  </a:solidFill>
-                </a:ln>
                 <a:solidFill>
-                  <a:srgbClr val="ffffff"/>
+                  <a:srgbClr val="151515"/>
                 </a:solidFill>
                 <a:latin typeface="LG Smart UI Bold"/>
                 <a:ea typeface="LG Smart UI Bold"/>

--- a/EMART/이마트에브리데이_사업제안서_v3_260301.pptx
+++ b/EMART/이마트에브리데이_사업제안서_v3_260301.pptx
@@ -2812,6 +2812,74 @@
           <a:chExt cx="0" cy="0"/>
         </a:xfrm>
       </p:grpSpPr>
+      <p:pic>
+        <p:nvPicPr>
+          <p:cNvPr id="9" name="Picture 8" descr="_cover_sign.png"/>
+          <p:cNvPicPr>
+            <a:picLocks noChangeAspect="1"/>
+          </p:cNvPicPr>
+          <p:nvPr/>
+        </p:nvPicPr>
+        <p:blipFill>
+          <a:blip r:embed="rId3"/>
+          <a:stretch>
+            <a:fillRect/>
+          </a:stretch>
+        </p:blipFill>
+        <p:spPr>
+          <a:xfrm>
+            <a:off x="4572000" y="0"/>
+            <a:ext cx="4572000" cy="5143500"/>
+          </a:xfrm>
+          <a:prstGeom prst="rect">
+            <a:avLst/>
+          </a:prstGeom>
+        </p:spPr>
+      </p:pic>
+      <p:sp>
+        <p:nvSpPr>
+          <p:cNvPr id="8" name="Rectangle 7"/>
+          <p:cNvSpPr/>
+          <p:nvPr/>
+        </p:nvSpPr>
+        <p:spPr>
+          <a:xfrm>
+            <a:off x="0" y="0"/>
+            <a:ext cx="4572000" cy="5143500"/>
+          </a:xfrm>
+          <a:prstGeom prst="rect">
+            <a:avLst/>
+          </a:prstGeom>
+          <a:solidFill>
+            <a:srgbClr val="FFD200"/>
+          </a:solidFill>
+          <a:ln>
+            <a:noFill/>
+          </a:ln>
+          <a:effectLst/>
+        </p:spPr>
+        <p:style>
+          <a:lnRef idx="1">
+            <a:schemeClr val="accent1"/>
+          </a:lnRef>
+          <a:fillRef idx="3">
+            <a:schemeClr val="accent1"/>
+          </a:fillRef>
+          <a:effectRef idx="2">
+            <a:schemeClr val="accent1"/>
+          </a:effectRef>
+          <a:fontRef idx="minor">
+            <a:schemeClr val="lt1"/>
+          </a:fontRef>
+        </p:style>
+        <p:txBody>
+          <a:bodyPr rtlCol="0" anchor="ctr"/>
+          <a:lstStyle/>
+          <a:p>
+            <a:pPr algn="ctr"/>
+          </a:p>
+        </p:txBody>
+      </p:sp>
       <p:sp>
         <p:nvSpPr>
           <p:cNvPr id="4" name="Text 1"/>
@@ -2820,8 +2888,8 @@
         </p:nvSpPr>
         <p:spPr>
           <a:xfrm>
-            <a:off x="457200" y="1371600"/>
-            <a:ext cx="5121215" cy="2286000"/>
+            <a:off x="411480" y="1280160"/>
+            <a:ext cx="3931920" cy="2560320"/>
           </a:xfrm>
           <a:prstGeom prst="rect">
             <a:avLst/>
@@ -2838,7 +2906,7 @@
               <a:defRPr/>
             </a:pPr>
             <a:r>
-              <a:rPr lang="en-US" sz="2800" b="1">
+              <a:rPr lang="en-US" sz="3000" b="1">
                 <a:solidFill>
                   <a:srgbClr val="151515"/>
                 </a:solidFill>
@@ -2861,7 +2929,7 @@
               <a:defRPr/>
             </a:pPr>
             <a:r>
-              <a:rPr lang="en-US" sz="1600">
+              <a:rPr lang="en-US" sz="1600" b="0">
                 <a:solidFill>
                   <a:srgbClr val="151515"/>
                 </a:solidFill>
@@ -2885,8 +2953,8 @@
         </p:nvSpPr>
         <p:spPr>
           <a:xfrm>
-            <a:off x="457200" y="4411980"/>
-            <a:ext cx="2133600" cy="365760"/>
+            <a:off x="411480" y="4251960"/>
+            <a:ext cx="3931920" cy="274320"/>
           </a:xfrm>
           <a:prstGeom prst="rect">
             <a:avLst/>
@@ -2903,9 +2971,9 @@
               <a:defRPr/>
             </a:pPr>
             <a:r>
-              <a:rPr lang="en-US" sz="1000">
+              <a:rPr lang="en-US" sz="1100">
                 <a:solidFill>
-                  <a:srgbClr val="666666"/>
+                  <a:srgbClr val="151515"/>
                 </a:solidFill>
               </a:rPr>
               <a:t>제안사명</a:t>
@@ -2922,8 +2990,8 @@
         </p:nvSpPr>
         <p:spPr>
           <a:xfrm>
-            <a:off x="3505200" y="4411980"/>
-            <a:ext cx="2133600" cy="365760"/>
+            <a:off x="411480" y="4507992"/>
+            <a:ext cx="3931920" cy="274320"/>
           </a:xfrm>
           <a:prstGeom prst="rect">
             <a:avLst/>
@@ -2940,9 +3008,9 @@
               <a:defRPr/>
             </a:pPr>
             <a:r>
-              <a:rPr lang="en-US" sz="1000">
+              <a:rPr lang="en-US" sz="1100">
                 <a:solidFill>
-                  <a:srgbClr val="666666"/>
+                  <a:srgbClr val="151515"/>
                 </a:solidFill>
               </a:rPr>
               <a:t>제안일: 2026-03-01</a:t>
@@ -2959,8 +3027,8 @@
         </p:nvSpPr>
         <p:spPr>
           <a:xfrm>
-            <a:off x="6553200" y="4411980"/>
-            <a:ext cx="2133600" cy="365760"/>
+            <a:off x="411480" y="4764024"/>
+            <a:ext cx="3931920" cy="274320"/>
           </a:xfrm>
           <a:prstGeom prst="rect">
             <a:avLst/>
@@ -2977,9 +3045,9 @@
               <a:defRPr/>
             </a:pPr>
             <a:r>
-              <a:rPr lang="en-US" sz="1000">
+              <a:rPr lang="en-US" sz="1100">
                 <a:solidFill>
-                  <a:srgbClr val="666666"/>
+                  <a:srgbClr val="151515"/>
                 </a:solidFill>
               </a:rPr>
               <a:t>담당자 연락처: 010-0000-0000</a:t>

--- a/EMART/이마트에브리데이_사업제안서_v3_260301.pptx
+++ b/EMART/이마트에브리데이_사업제안서_v3_260301.pptx
@@ -2814,7 +2814,7 @@
       </p:grpSpPr>
       <p:pic>
         <p:nvPicPr>
-          <p:cNvPr id="9" name="Picture 8" descr="_cover_sign.png"/>
+          <p:cNvPr id="9" name="Picture 8" descr="_cover_bg.png"/>
           <p:cNvPicPr>
             <a:picLocks noChangeAspect="1"/>
           </p:cNvPicPr>
@@ -2888,8 +2888,8 @@
         </p:nvSpPr>
         <p:spPr>
           <a:xfrm>
-            <a:off x="411480" y="1280160"/>
-            <a:ext cx="3931920" cy="2560320"/>
+            <a:off x="320040" y="1280160"/>
+            <a:ext cx="4206240" cy="2560320"/>
           </a:xfrm>
           <a:prstGeom prst="rect">
             <a:avLst/>
@@ -2898,7 +2898,9 @@
           <a:ln/>
         </p:spPr>
         <p:txBody>
-          <a:bodyPr wrap="square" anchor="ctr"/>
+          <a:bodyPr wrap="square" anchor="ctr">
+            <a:noAutofit/>
+          </a:bodyPr>
           <a:lstStyle/>
           <a:p>
             <a:pPr marL="0" indent="0" algn="l">
@@ -2906,7 +2908,7 @@
               <a:defRPr/>
             </a:pPr>
             <a:r>
-              <a:rPr lang="en-US" sz="3000" b="1">
+              <a:rPr lang="en-US" sz="2000" b="1">
                 <a:solidFill>
                   <a:srgbClr val="151515"/>
                 </a:solidFill>
@@ -2929,7 +2931,7 @@
               <a:defRPr/>
             </a:pPr>
             <a:r>
-              <a:rPr lang="en-US" sz="1600" b="0">
+              <a:rPr lang="en-US" sz="1300" b="0">
                 <a:solidFill>
                   <a:srgbClr val="151515"/>
                 </a:solidFill>
@@ -2953,8 +2955,8 @@
         </p:nvSpPr>
         <p:spPr>
           <a:xfrm>
-            <a:off x="411480" y="4251960"/>
-            <a:ext cx="3931920" cy="274320"/>
+            <a:off x="320040" y="4297680"/>
+            <a:ext cx="4206240" cy="256032"/>
           </a:xfrm>
           <a:prstGeom prst="rect">
             <a:avLst/>
@@ -2990,8 +2992,8 @@
         </p:nvSpPr>
         <p:spPr>
           <a:xfrm>
-            <a:off x="411480" y="4507992"/>
-            <a:ext cx="3931920" cy="274320"/>
+            <a:off x="320040" y="4553712"/>
+            <a:ext cx="4206240" cy="256032"/>
           </a:xfrm>
           <a:prstGeom prst="rect">
             <a:avLst/>
@@ -3027,8 +3029,8 @@
         </p:nvSpPr>
         <p:spPr>
           <a:xfrm>
-            <a:off x="411480" y="4764024"/>
-            <a:ext cx="3931920" cy="274320"/>
+            <a:off x="320040" y="4809744"/>
+            <a:ext cx="4206240" cy="256032"/>
           </a:xfrm>
           <a:prstGeom prst="rect">
             <a:avLst/>

--- a/EMART/이마트에브리데이_사업제안서_v3_260301.pptx
+++ b/EMART/이마트에브리데이_사업제안서_v3_260301.pptx
@@ -2888,8 +2888,8 @@
         </p:nvSpPr>
         <p:spPr>
           <a:xfrm>
-            <a:off x="320040" y="1280160"/>
-            <a:ext cx="4206240" cy="2560320"/>
+            <a:off x="365760" y="1828800"/>
+            <a:ext cx="4114800" cy="2194560"/>
           </a:xfrm>
           <a:prstGeom prst="rect">
             <a:avLst/>
@@ -2898,7 +2898,7 @@
           <a:ln/>
         </p:spPr>
         <p:txBody>
-          <a:bodyPr wrap="square" anchor="ctr">
+          <a:bodyPr wrap="square" anchor="ctr" lIns="0" rIns="0" tIns="0" bIns="0">
             <a:noAutofit/>
           </a:bodyPr>
           <a:lstStyle/>
@@ -2908,7 +2908,7 @@
               <a:defRPr/>
             </a:pPr>
             <a:r>
-              <a:rPr lang="en-US" sz="2000" b="1">
+              <a:rPr lang="en-US" sz="2600" b="1">
                 <a:solidFill>
                   <a:srgbClr val="151515"/>
                 </a:solidFill>
@@ -2931,7 +2931,7 @@
               <a:defRPr/>
             </a:pPr>
             <a:r>
-              <a:rPr lang="en-US" sz="1300" b="0">
+              <a:rPr lang="en-US" sz="1200" b="0">
                 <a:solidFill>
                   <a:srgbClr val="151515"/>
                 </a:solidFill>
@@ -2955,8 +2955,8 @@
         </p:nvSpPr>
         <p:spPr>
           <a:xfrm>
-            <a:off x="320040" y="4297680"/>
-            <a:ext cx="4206240" cy="256032"/>
+            <a:off x="365760" y="4343400"/>
+            <a:ext cx="4572000" cy="201168"/>
           </a:xfrm>
           <a:prstGeom prst="rect">
             <a:avLst/>
@@ -2965,7 +2965,7 @@
           <a:ln/>
         </p:spPr>
         <p:txBody>
-          <a:bodyPr wrap="square" anchor="ctr"/>
+          <a:bodyPr wrap="square" anchor="ctr" lIns="0" rIns="0" tIns="0" bIns="0"/>
           <a:lstStyle/>
           <a:p>
             <a:pPr marL="0" indent="0">
@@ -2973,7 +2973,7 @@
               <a:defRPr/>
             </a:pPr>
             <a:r>
-              <a:rPr lang="en-US" sz="1100">
+              <a:rPr lang="en-US" sz="1000">
                 <a:solidFill>
                   <a:srgbClr val="151515"/>
                 </a:solidFill>
@@ -2992,8 +2992,8 @@
         </p:nvSpPr>
         <p:spPr>
           <a:xfrm>
-            <a:off x="320040" y="4553712"/>
-            <a:ext cx="4206240" cy="256032"/>
+            <a:off x="365760" y="4553712"/>
+            <a:ext cx="4572000" cy="201168"/>
           </a:xfrm>
           <a:prstGeom prst="rect">
             <a:avLst/>
@@ -3002,7 +3002,7 @@
           <a:ln/>
         </p:spPr>
         <p:txBody>
-          <a:bodyPr wrap="square" anchor="ctr"/>
+          <a:bodyPr wrap="square" anchor="ctr" lIns="0" rIns="0" tIns="0" bIns="0"/>
           <a:lstStyle/>
           <a:p>
             <a:pPr marL="0" indent="0">
@@ -3010,7 +3010,7 @@
               <a:defRPr/>
             </a:pPr>
             <a:r>
-              <a:rPr lang="en-US" sz="1100">
+              <a:rPr lang="en-US" sz="1000">
                 <a:solidFill>
                   <a:srgbClr val="151515"/>
                 </a:solidFill>
@@ -3029,8 +3029,8 @@
         </p:nvSpPr>
         <p:spPr>
           <a:xfrm>
-            <a:off x="320040" y="4809744"/>
-            <a:ext cx="4206240" cy="256032"/>
+            <a:off x="365760" y="4764024"/>
+            <a:ext cx="4572000" cy="201168"/>
           </a:xfrm>
           <a:prstGeom prst="rect">
             <a:avLst/>
@@ -3039,7 +3039,7 @@
           <a:ln/>
         </p:spPr>
         <p:txBody>
-          <a:bodyPr wrap="square" anchor="ctr"/>
+          <a:bodyPr wrap="square" anchor="ctr" lIns="0" rIns="0" tIns="0" bIns="0"/>
           <a:lstStyle/>
           <a:p>
             <a:pPr marL="0" indent="0">
@@ -3047,7 +3047,7 @@
               <a:defRPr/>
             </a:pPr>
             <a:r>
-              <a:rPr lang="en-US" sz="1100">
+              <a:rPr lang="en-US" sz="1000">
                 <a:solidFill>
                   <a:srgbClr val="151515"/>
                 </a:solidFill>
@@ -3055,6 +3055,251 @@
               <a:t>담당자 연락처: 010-0000-0000</a:t>
             </a:r>
             <a:endParaRPr lang="en-US" sz="1000"/>
+          </a:p>
+        </p:txBody>
+      </p:sp>
+      <p:sp>
+        <p:nvSpPr>
+          <p:cNvPr id="10" name="Rectangle 9"/>
+          <p:cNvSpPr/>
+          <p:nvPr/>
+        </p:nvSpPr>
+        <p:spPr>
+          <a:xfrm>
+            <a:off x="0" y="0"/>
+            <a:ext cx="9144000" cy="347472"/>
+          </a:xfrm>
+          <a:prstGeom prst="rect">
+            <a:avLst/>
+          </a:prstGeom>
+          <a:solidFill>
+            <a:srgbClr val="151515"/>
+          </a:solidFill>
+          <a:ln>
+            <a:noFill/>
+          </a:ln>
+          <a:effectLst/>
+        </p:spPr>
+        <p:style>
+          <a:lnRef idx="1">
+            <a:schemeClr val="accent1"/>
+          </a:lnRef>
+          <a:fillRef idx="3">
+            <a:schemeClr val="accent1"/>
+          </a:fillRef>
+          <a:effectRef idx="2">
+            <a:schemeClr val="accent1"/>
+          </a:effectRef>
+          <a:fontRef idx="minor">
+            <a:schemeClr val="lt1"/>
+          </a:fontRef>
+        </p:style>
+        <p:txBody>
+          <a:bodyPr rtlCol="0" anchor="ctr"/>
+          <a:lstStyle/>
+          <a:p>
+            <a:pPr algn="ctr"/>
+          </a:p>
+        </p:txBody>
+      </p:sp>
+      <p:sp>
+        <p:nvSpPr>
+          <p:cNvPr id="11" name="Rectangle 10"/>
+          <p:cNvSpPr/>
+          <p:nvPr/>
+        </p:nvSpPr>
+        <p:spPr>
+          <a:xfrm>
+            <a:off x="0" y="5070348"/>
+            <a:ext cx="9144000" cy="73152"/>
+          </a:xfrm>
+          <a:prstGeom prst="rect">
+            <a:avLst/>
+          </a:prstGeom>
+          <a:solidFill>
+            <a:srgbClr val="151515"/>
+          </a:solidFill>
+          <a:ln>
+            <a:noFill/>
+          </a:ln>
+          <a:effectLst/>
+        </p:spPr>
+        <p:style>
+          <a:lnRef idx="1">
+            <a:schemeClr val="accent1"/>
+          </a:lnRef>
+          <a:fillRef idx="3">
+            <a:schemeClr val="accent1"/>
+          </a:fillRef>
+          <a:effectRef idx="2">
+            <a:schemeClr val="accent1"/>
+          </a:effectRef>
+          <a:fontRef idx="minor">
+            <a:schemeClr val="lt1"/>
+          </a:fontRef>
+        </p:style>
+        <p:txBody>
+          <a:bodyPr rtlCol="0" anchor="ctr"/>
+          <a:lstStyle/>
+          <a:p>
+            <a:pPr algn="ctr"/>
+          </a:p>
+        </p:txBody>
+      </p:sp>
+      <p:sp>
+        <p:nvSpPr>
+          <p:cNvPr id="12" name="TextBox 11"/>
+          <p:cNvSpPr txBox="1"/>
+          <p:nvPr/>
+        </p:nvSpPr>
+        <p:spPr>
+          <a:xfrm>
+            <a:off x="365760" y="73152"/>
+            <a:ext cx="6400800" cy="228600"/>
+          </a:xfrm>
+          <a:prstGeom prst="rect">
+            <a:avLst/>
+          </a:prstGeom>
+          <a:noFill/>
+        </p:spPr>
+        <p:txBody>
+          <a:bodyPr wrap="square" lIns="0" rIns="0" tIns="0" bIns="0">
+            <a:noAutofit/>
+          </a:bodyPr>
+          <a:lstStyle/>
+          <a:p>
+            <a:r>
+              <a:rPr sz="1000" b="1">
+                <a:solidFill>
+                  <a:srgbClr val="FFD200"/>
+                </a:solidFill>
+                <a:latin typeface="Consolas"/>
+              </a:rPr>
+              <a:t>EMART EVERYDAY   ·   PROPOSAL   ·   2026.03</a:t>
+            </a:r>
+          </a:p>
+        </p:txBody>
+      </p:sp>
+      <p:sp>
+        <p:nvSpPr>
+          <p:cNvPr id="13" name="TextBox 12"/>
+          <p:cNvSpPr txBox="1"/>
+          <p:nvPr/>
+        </p:nvSpPr>
+        <p:spPr>
+          <a:xfrm>
+            <a:off x="6949440" y="54864"/>
+            <a:ext cx="1828800" cy="256032"/>
+          </a:xfrm>
+          <a:prstGeom prst="rect">
+            <a:avLst/>
+          </a:prstGeom>
+          <a:noFill/>
+        </p:spPr>
+        <p:txBody>
+          <a:bodyPr wrap="square" lIns="0" rIns="0" tIns="0" bIns="0">
+            <a:noAutofit/>
+          </a:bodyPr>
+          <a:lstStyle/>
+          <a:p>
+            <a:pPr algn="r"/>
+            <a:r>
+              <a:rPr sz="1200" b="1">
+                <a:solidFill>
+                  <a:srgbClr val="FFD200"/>
+                </a:solidFill>
+                <a:latin typeface="Consolas"/>
+              </a:rPr>
+              <a:t>NO.01 / 01</a:t>
+            </a:r>
+          </a:p>
+        </p:txBody>
+      </p:sp>
+      <p:sp>
+        <p:nvSpPr>
+          <p:cNvPr id="14" name="Rectangle 13"/>
+          <p:cNvSpPr/>
+          <p:nvPr/>
+        </p:nvSpPr>
+        <p:spPr>
+          <a:xfrm>
+            <a:off x="384048" y="1600200"/>
+            <a:ext cx="548640" cy="36576"/>
+          </a:xfrm>
+          <a:prstGeom prst="rect">
+            <a:avLst/>
+          </a:prstGeom>
+          <a:solidFill>
+            <a:srgbClr val="151515"/>
+          </a:solidFill>
+          <a:ln>
+            <a:noFill/>
+          </a:ln>
+          <a:effectLst/>
+        </p:spPr>
+        <p:style>
+          <a:lnRef idx="1">
+            <a:schemeClr val="accent1"/>
+          </a:lnRef>
+          <a:fillRef idx="3">
+            <a:schemeClr val="accent1"/>
+          </a:fillRef>
+          <a:effectRef idx="2">
+            <a:schemeClr val="accent1"/>
+          </a:effectRef>
+          <a:fontRef idx="minor">
+            <a:schemeClr val="lt1"/>
+          </a:fontRef>
+        </p:style>
+        <p:txBody>
+          <a:bodyPr rtlCol="0" anchor="ctr"/>
+          <a:lstStyle/>
+          <a:p>
+            <a:pPr algn="ctr"/>
+          </a:p>
+        </p:txBody>
+      </p:sp>
+      <p:sp>
+        <p:nvSpPr>
+          <p:cNvPr id="15" name="Rectangle 14"/>
+          <p:cNvSpPr/>
+          <p:nvPr/>
+        </p:nvSpPr>
+        <p:spPr>
+          <a:xfrm>
+            <a:off x="384048" y="4206240"/>
+            <a:ext cx="731520" cy="27432"/>
+          </a:xfrm>
+          <a:prstGeom prst="rect">
+            <a:avLst/>
+          </a:prstGeom>
+          <a:solidFill>
+            <a:srgbClr val="151515"/>
+          </a:solidFill>
+          <a:ln>
+            <a:noFill/>
+          </a:ln>
+          <a:effectLst/>
+        </p:spPr>
+        <p:style>
+          <a:lnRef idx="1">
+            <a:schemeClr val="accent1"/>
+          </a:lnRef>
+          <a:fillRef idx="3">
+            <a:schemeClr val="accent1"/>
+          </a:fillRef>
+          <a:effectRef idx="2">
+            <a:schemeClr val="accent1"/>
+          </a:effectRef>
+          <a:fontRef idx="minor">
+            <a:schemeClr val="lt1"/>
+          </a:fontRef>
+        </p:style>
+        <p:txBody>
+          <a:bodyPr rtlCol="0" anchor="ctr"/>
+          <a:lstStyle/>
+          <a:p>
+            <a:pPr algn="ctr"/>
           </a:p>
         </p:txBody>
       </p:sp>

--- a/EMART/이마트에브리데이_사업제안서_v3_260301.pptx
+++ b/EMART/이마트에브리데이_사업제안서_v3_260301.pptx
@@ -2851,7 +2851,7 @@
             <a:avLst/>
           </a:prstGeom>
           <a:solidFill>
-            <a:srgbClr val="FFD200"/>
+            <a:srgbClr val="FFE880"/>
           </a:solidFill>
           <a:ln>
             <a:noFill/>
@@ -3171,7 +3171,7 @@
             <a:r>
               <a:rPr sz="1000" b="1">
                 <a:solidFill>
-                  <a:srgbClr val="FFD200"/>
+                  <a:srgbClr val="FFE880"/>
                 </a:solidFill>
                 <a:latin typeface="Consolas"/>
               </a:rPr>
@@ -3206,7 +3206,7 @@
             <a:r>
               <a:rPr sz="1200" b="1">
                 <a:solidFill>
-                  <a:srgbClr val="FFD200"/>
+                  <a:srgbClr val="FFE880"/>
                 </a:solidFill>
                 <a:latin typeface="Consolas"/>
               </a:rPr>
@@ -8040,7 +8040,7 @@
             <a:avLst/>
           </a:prstGeom>
           <a:solidFill>
-            <a:srgbClr val="FFD200"/>
+            <a:srgbClr val="FFF0A0"/>
           </a:solidFill>
           <a:ln w="15875">
             <a:solidFill>
@@ -8147,7 +8147,7 @@
             </a:avLst>
           </a:prstGeom>
           <a:solidFill>
-            <a:srgbClr val="FFD200"/>
+            <a:srgbClr val="151515"/>
           </a:solidFill>
           <a:ln w="15875">
             <a:solidFill>
@@ -8184,7 +8184,7 @@
             <a:avLst/>
           </a:prstGeom>
           <a:solidFill>
-            <a:srgbClr val="FFD200"/>
+            <a:srgbClr val="FFDC35"/>
           </a:solidFill>
           <a:ln w="15875">
             <a:solidFill>
@@ -8291,7 +8291,7 @@
             </a:avLst>
           </a:prstGeom>
           <a:solidFill>
-            <a:srgbClr val="FFD200"/>
+            <a:srgbClr val="151515"/>
           </a:solidFill>
           <a:ln w="15875">
             <a:solidFill>
@@ -8328,7 +8328,7 @@
             <a:avLst/>
           </a:prstGeom>
           <a:solidFill>
-            <a:srgbClr val="FFD200"/>
+            <a:srgbClr val="F7C100"/>
           </a:solidFill>
           <a:ln w="15875">
             <a:solidFill>
@@ -8435,7 +8435,7 @@
             </a:avLst>
           </a:prstGeom>
           <a:solidFill>
-            <a:srgbClr val="FFD200"/>
+            <a:srgbClr val="151515"/>
           </a:solidFill>
           <a:ln w="15875">
             <a:solidFill>
@@ -8472,7 +8472,7 @@
             <a:avLst/>
           </a:prstGeom>
           <a:solidFill>
-            <a:srgbClr val="FFD200"/>
+            <a:srgbClr val="E69E00"/>
           </a:solidFill>
           <a:ln w="15875">
             <a:solidFill>
@@ -11189,7 +11189,7 @@
             <a:avLst/>
           </a:prstGeom>
           <a:solidFill>
-            <a:srgbClr val="FFD200"/>
+            <a:srgbClr val="FFF0A0"/>
           </a:solidFill>
           <a:ln w="15875">
             <a:solidFill>
@@ -11296,7 +11296,7 @@
             </a:avLst>
           </a:prstGeom>
           <a:solidFill>
-            <a:srgbClr val="FFD200"/>
+            <a:srgbClr val="151515"/>
           </a:solidFill>
           <a:ln w="15875">
             <a:solidFill>
@@ -11333,7 +11333,7 @@
             <a:avLst/>
           </a:prstGeom>
           <a:solidFill>
-            <a:srgbClr val="FFD200"/>
+            <a:srgbClr val="FFE150"/>
           </a:solidFill>
           <a:ln w="15875">
             <a:solidFill>
@@ -11440,7 +11440,7 @@
             </a:avLst>
           </a:prstGeom>
           <a:solidFill>
-            <a:srgbClr val="FFD200"/>
+            <a:srgbClr val="151515"/>
           </a:solidFill>
           <a:ln w="15875">
             <a:solidFill>
@@ -11584,7 +11584,7 @@
             </a:avLst>
           </a:prstGeom>
           <a:solidFill>
-            <a:srgbClr val="FFD200"/>
+            <a:srgbClr val="151515"/>
           </a:solidFill>
           <a:ln w="15875">
             <a:solidFill>
@@ -11621,7 +11621,7 @@
             <a:avLst/>
           </a:prstGeom>
           <a:solidFill>
-            <a:srgbClr val="FFD200"/>
+            <a:srgbClr val="F2B800"/>
           </a:solidFill>
           <a:ln w="15875">
             <a:solidFill>
@@ -11728,7 +11728,7 @@
             </a:avLst>
           </a:prstGeom>
           <a:solidFill>
-            <a:srgbClr val="FFD200"/>
+            <a:srgbClr val="151515"/>
           </a:solidFill>
           <a:ln w="15875">
             <a:solidFill>
@@ -11765,7 +11765,7 @@
             <a:avLst/>
           </a:prstGeom>
           <a:solidFill>
-            <a:srgbClr val="FFD200"/>
+            <a:srgbClr val="E69E00"/>
           </a:solidFill>
           <a:ln w="15875">
             <a:solidFill>
